--- a/classes/parte-2-criptografia-aplicada/065-implementaciones-seguras-y-errores-criptograficos-comunes/clase-065-presentacion.pptx
+++ b/classes/parte-2-criptografia-aplicada/065-implementaciones-seguras-y-errores-criptograficos-comunes/clase-065-presentacion.pptx
@@ -17,6 +17,9 @@
     <p:sldId id="265" r:id="rId16"/>
     <p:sldId id="266" r:id="rId17"/>
     <p:sldId id="267" r:id="rId18"/>
+    <p:sldId id="268" r:id="rId19"/>
+    <p:sldId id="269" r:id="rId20"/>
+    <p:sldId id="270" r:id="rId21"/>
   </p:sldIdLst>
   <p:sldSz cx="9144000" cy="6858000" type="screen4x3"/>
   <p:notesSz cx="6858000" cy="9144000"/>
@@ -3198,7 +3201,7 @@
                   <a:srgbClr val="0B3D2E"/>
                 </a:solidFill>
               </a:rPr>
-              <a:t>⚠️ Errores comunes</a:t>
+              <a:t>✍️ Ejercicios</a:t>
             </a:r>
           </a:p>
         </p:txBody>
@@ -3236,82 +3239,82 @@
                   <a:srgbClr val="22282E"/>
                 </a:solidFill>
               </a:rPr>
-              <a:t>•  Clave/secreto en el repositorio — Muévelo a KMS/Vault/variables; escanea el histórico</a:t>
-            </a:r>
-          </a:p>
-          <a:p>
-            <a:pPr>
-              <a:spcAft>
-                <a:spcPts val="600"/>
-              </a:spcAft>
-            </a:pPr>
-            <a:r>
-              <a:rPr sz="1500">
-                <a:solidFill>
-                  <a:srgbClr val="22282E"/>
-                </a:solidFill>
-              </a:rPr>
-              <a:t>•  ECB o cifrado sin autenticar — Usa AEAD (GCM/ChaCha20-Poly1305)</a:t>
-            </a:r>
-          </a:p>
-          <a:p>
-            <a:pPr>
-              <a:spcAft>
-                <a:spcPts val="600"/>
-              </a:spcAft>
-            </a:pPr>
-            <a:r>
-              <a:rPr sz="1500">
-                <a:solidFill>
-                  <a:srgbClr val="22282E"/>
-                </a:solidFill>
-              </a:rPr>
-              <a:t>•  IV/nonce fijo o reutilizado — Genera con CSPRNG; garantiza unicidad</a:t>
-            </a:r>
-          </a:p>
-          <a:p>
-            <a:pPr>
-              <a:spcAft>
-                <a:spcPts val="600"/>
-              </a:spcAft>
-            </a:pPr>
-            <a:r>
-              <a:rPr sz="1500">
-                <a:solidFill>
-                  <a:srgbClr val="22282E"/>
-                </a:solidFill>
-              </a:rPr>
-              <a:t>•  MD5/SHA-1/DES/RC4 en uso — Sustituye por SHA-256/3, AES-GCM, Argon2id</a:t>
-            </a:r>
-          </a:p>
-          <a:p>
-            <a:pPr>
-              <a:spcAft>
-                <a:spcPts val="600"/>
-              </a:spcAft>
-            </a:pPr>
-            <a:r>
-              <a:rPr sz="1500">
-                <a:solidFill>
-                  <a:srgbClr val="22282E"/>
-                </a:solidFill>
-              </a:rPr>
-              <a:t>•  Comparaciones con == de secretos — Usa comparedigest/verificadores de la librería</a:t>
-            </a:r>
-          </a:p>
-          <a:p>
-            <a:pPr>
-              <a:spcAft>
-                <a:spcPts val="600"/>
-              </a:spcAft>
-            </a:pPr>
-            <a:r>
-              <a:rPr sz="1500">
-                <a:solidFill>
-                  <a:srgbClr val="22282E"/>
-                </a:solidFill>
-              </a:rPr>
-              <a:t>•  "Cripto propia" sin auditar — Usa librerías estándar bien mantenidas</a:t>
+              <a:t>•  Lista siete anti-patrones cripto y su corrección.</a:t>
+            </a:r>
+          </a:p>
+          <a:p>
+            <a:pPr>
+              <a:spcAft>
+                <a:spcPts val="600"/>
+              </a:spcAft>
+            </a:pPr>
+            <a:r>
+              <a:rPr sz="1500">
+                <a:solidFill>
+                  <a:srgbClr val="22282E"/>
+                </a:solidFill>
+              </a:rPr>
+              <a:t>•  Reescribe el fragmento vulnerable del laboratorio de forma segura.</a:t>
+            </a:r>
+          </a:p>
+          <a:p>
+            <a:pPr>
+              <a:spcAft>
+                <a:spcPts val="600"/>
+              </a:spcAft>
+            </a:pPr>
+            <a:r>
+              <a:rPr sz="1500">
+                <a:solidFill>
+                  <a:srgbClr val="22282E"/>
+                </a:solidFill>
+              </a:rPr>
+              <a:t>•  Ejecuta bandit y explica cada advertencia relevante.</a:t>
+            </a:r>
+          </a:p>
+          <a:p>
+            <a:pPr>
+              <a:spcAft>
+                <a:spcPts val="600"/>
+              </a:spcAft>
+            </a:pPr>
+            <a:r>
+              <a:rPr sz="1500">
+                <a:solidFill>
+                  <a:srgbClr val="22282E"/>
+                </a:solidFill>
+              </a:rPr>
+              <a:t>•  Diseña un formato de mensaje cifrado con versión para criptoagilidad.</a:t>
+            </a:r>
+          </a:p>
+          <a:p>
+            <a:pPr>
+              <a:spcAft>
+                <a:spcPts val="600"/>
+              </a:spcAft>
+            </a:pPr>
+            <a:r>
+              <a:rPr sz="1500">
+                <a:solidFill>
+                  <a:srgbClr val="22282E"/>
+                </a:solidFill>
+              </a:rPr>
+              <a:t>•  Audita una configuración TLS y una de almacenamiento de contraseñas juntas.</a:t>
+            </a:r>
+          </a:p>
+          <a:p>
+            <a:pPr>
+              <a:spcAft>
+                <a:spcPts val="600"/>
+              </a:spcAft>
+            </a:pPr>
+            <a:r>
+              <a:rPr sz="1500">
+                <a:solidFill>
+                  <a:srgbClr val="22282E"/>
+                </a:solidFill>
+              </a:rPr>
+              <a:t>•  Redacta una guía interna de "reglas de oro cripto" para tu equipo.</a:t>
             </a:r>
           </a:p>
         </p:txBody>
@@ -3362,7 +3365,7 @@
                   <a:srgbClr val="0B3D2E"/>
                 </a:solidFill>
               </a:rPr>
-              <a:t>❓ Preguntas frecuentes</a:t>
+              <a:t>📝 Reto verificable</a:t>
             </a:r>
           </a:p>
         </p:txBody>
@@ -3400,82 +3403,7 @@
                   <a:srgbClr val="22282E"/>
                 </a:solidFill>
               </a:rPr>
-              <a:t>•  ❓ ¿Cuál es la regla más importante?</a:t>
-            </a:r>
-          </a:p>
-          <a:p>
-            <a:pPr>
-              <a:spcAft>
-                <a:spcPts val="600"/>
-              </a:spcAft>
-            </a:pPr>
-            <a:r>
-              <a:rPr sz="1500">
-                <a:solidFill>
-                  <a:srgbClr val="22282E"/>
-                </a:solidFill>
-              </a:rPr>
-              <a:t>•  No inventes tu propia cripto: usa primitivas y librerías auditadas con defaults seguros (AEAD, KDFs lentas, curvas modernas).</a:t>
-            </a:r>
-          </a:p>
-          <a:p>
-            <a:pPr>
-              <a:spcAft>
-                <a:spcPts val="600"/>
-              </a:spcAft>
-            </a:pPr>
-            <a:r>
-              <a:rPr sz="1500">
-                <a:solidFill>
-                  <a:srgbClr val="22282E"/>
-                </a:solidFill>
-              </a:rPr>
-              <a:t>•  ❓ ¿Cómo detecto estos fallos a escala?</a:t>
-            </a:r>
-          </a:p>
-          <a:p>
-            <a:pPr>
-              <a:spcAft>
-                <a:spcPts val="600"/>
-              </a:spcAft>
-            </a:pPr>
-            <a:r>
-              <a:rPr sz="1500">
-                <a:solidFill>
-                  <a:srgbClr val="22282E"/>
-                </a:solidFill>
-              </a:rPr>
-              <a:t>•  Combina revisión manual con escáneres (bandit, semgrep, gitleaks) integrados en CI, y auditorías periódicas de TLS y almacenamiento.</a:t>
-            </a:r>
-          </a:p>
-          <a:p>
-            <a:pPr>
-              <a:spcAft>
-                <a:spcPts val="600"/>
-              </a:spcAft>
-            </a:pPr>
-            <a:r>
-              <a:rPr sz="1500">
-                <a:solidFill>
-                  <a:srgbClr val="22282E"/>
-                </a:solidFill>
-              </a:rPr>
-              <a:t>•  ❓ ¿Qué es la criptoagilidad y por qué me importa ahora?</a:t>
-            </a:r>
-          </a:p>
-          <a:p>
-            <a:pPr>
-              <a:spcAft>
-                <a:spcPts val="600"/>
-              </a:spcAft>
-            </a:pPr>
-            <a:r>
-              <a:rPr sz="1500">
-                <a:solidFill>
-                  <a:srgbClr val="22282E"/>
-                </a:solidFill>
-              </a:rPr>
-              <a:t>•  Poder cambiar algoritmos y claves sin rediseñar; será imprescindible en la migración post-cuántica y ante cualquier primitiva que se debilite.</a:t>
+              <a:t>•  Toma un módulo con al menos cinco fallos criptográficos (el del laboratorio u otro que construyas) y entrégalo corregido: AEAD, nonces del CSPRNG, claves fuera del código, Argon2id para contraseñas y…</a:t>
             </a:r>
           </a:p>
         </p:txBody>
@@ -3526,7 +3454,7 @@
                   <a:srgbClr val="0B3D2E"/>
                 </a:solidFill>
               </a:rPr>
-              <a:t>🔗 Referencias</a:t>
+              <a:t>⚠️ Errores comunes</a:t>
             </a:r>
           </a:p>
         </p:txBody>
@@ -3564,6 +3492,334 @@
                   <a:srgbClr val="22282E"/>
                 </a:solidFill>
               </a:rPr>
+              <a:t>•  Clave/secreto en el repositorio — Muévelo a KMS/Vault/variables; escanea el histórico</a:t>
+            </a:r>
+          </a:p>
+          <a:p>
+            <a:pPr>
+              <a:spcAft>
+                <a:spcPts val="600"/>
+              </a:spcAft>
+            </a:pPr>
+            <a:r>
+              <a:rPr sz="1500">
+                <a:solidFill>
+                  <a:srgbClr val="22282E"/>
+                </a:solidFill>
+              </a:rPr>
+              <a:t>•  ECB o cifrado sin autenticar — Usa AEAD (GCM/ChaCha20-Poly1305)</a:t>
+            </a:r>
+          </a:p>
+          <a:p>
+            <a:pPr>
+              <a:spcAft>
+                <a:spcPts val="600"/>
+              </a:spcAft>
+            </a:pPr>
+            <a:r>
+              <a:rPr sz="1500">
+                <a:solidFill>
+                  <a:srgbClr val="22282E"/>
+                </a:solidFill>
+              </a:rPr>
+              <a:t>•  IV/nonce fijo o reutilizado — Genera con CSPRNG; garantiza unicidad</a:t>
+            </a:r>
+          </a:p>
+          <a:p>
+            <a:pPr>
+              <a:spcAft>
+                <a:spcPts val="600"/>
+              </a:spcAft>
+            </a:pPr>
+            <a:r>
+              <a:rPr sz="1500">
+                <a:solidFill>
+                  <a:srgbClr val="22282E"/>
+                </a:solidFill>
+              </a:rPr>
+              <a:t>•  MD5/SHA-1/DES/RC4 en uso — Sustituye por SHA-256/3, AES-GCM, Argon2id</a:t>
+            </a:r>
+          </a:p>
+          <a:p>
+            <a:pPr>
+              <a:spcAft>
+                <a:spcPts val="600"/>
+              </a:spcAft>
+            </a:pPr>
+            <a:r>
+              <a:rPr sz="1500">
+                <a:solidFill>
+                  <a:srgbClr val="22282E"/>
+                </a:solidFill>
+              </a:rPr>
+              <a:t>•  Comparaciones con == de secretos — Usa comparedigest/verificadores de la librería</a:t>
+            </a:r>
+          </a:p>
+          <a:p>
+            <a:pPr>
+              <a:spcAft>
+                <a:spcPts val="600"/>
+              </a:spcAft>
+            </a:pPr>
+            <a:r>
+              <a:rPr sz="1500">
+                <a:solidFill>
+                  <a:srgbClr val="22282E"/>
+                </a:solidFill>
+              </a:rPr>
+              <a:t>•  "Cripto propia" sin auditar — Usa librerías estándar bien mantenidas</a:t>
+            </a:r>
+          </a:p>
+        </p:txBody>
+      </p:sp>
+    </p:spTree>
+  </p:cSld>
+  <p:clrMapOvr>
+    <a:masterClrMapping/>
+  </p:clrMapOvr>
+</p:sld>
+</file>
+
+<file path=ppt/slides/slide13.xml><?xml version="1.0" encoding="utf-8"?>
+<p:sld xmlns:a="http://schemas.openxmlformats.org/drawingml/2006/main" xmlns:p="http://schemas.openxmlformats.org/presentationml/2006/main" xmlns:r="http://schemas.openxmlformats.org/officeDocument/2006/relationships">
+  <p:cSld>
+    <p:spTree>
+      <p:nvGrpSpPr>
+        <p:cNvPr id="1" name=""/>
+        <p:cNvGrpSpPr/>
+        <p:nvPr/>
+      </p:nvGrpSpPr>
+      <p:grpSpPr/>
+      <p:sp>
+        <p:nvSpPr>
+          <p:cNvPr id="2" name="TextBox 1"/>
+          <p:cNvSpPr txBox="1"/>
+          <p:nvPr/>
+        </p:nvSpPr>
+        <p:spPr>
+          <a:xfrm>
+            <a:off x="457200" y="320040"/>
+            <a:ext cx="8229600" cy="822960"/>
+          </a:xfrm>
+          <a:prstGeom prst="rect">
+            <a:avLst/>
+          </a:prstGeom>
+          <a:noFill/>
+        </p:spPr>
+        <p:txBody>
+          <a:bodyPr wrap="square">
+            <a:spAutoFit/>
+          </a:bodyPr>
+          <a:lstStyle/>
+          <a:p>
+            <a:r>
+              <a:rPr sz="2600" b="1">
+                <a:solidFill>
+                  <a:srgbClr val="0B3D2E"/>
+                </a:solidFill>
+              </a:rPr>
+              <a:t>❓ Preguntas frecuentes</a:t>
+            </a:r>
+          </a:p>
+        </p:txBody>
+      </p:sp>
+      <p:sp>
+        <p:nvSpPr>
+          <p:cNvPr id="3" name="TextBox 2"/>
+          <p:cNvSpPr txBox="1"/>
+          <p:nvPr/>
+        </p:nvSpPr>
+        <p:spPr>
+          <a:xfrm>
+            <a:off x="457200" y="1280160"/>
+            <a:ext cx="8229600" cy="4937760"/>
+          </a:xfrm>
+          <a:prstGeom prst="rect">
+            <a:avLst/>
+          </a:prstGeom>
+          <a:noFill/>
+        </p:spPr>
+        <p:txBody>
+          <a:bodyPr wrap="square">
+            <a:spAutoFit/>
+          </a:bodyPr>
+          <a:lstStyle/>
+          <a:p>
+            <a:pPr>
+              <a:spcAft>
+                <a:spcPts val="600"/>
+              </a:spcAft>
+            </a:pPr>
+            <a:r>
+              <a:rPr sz="1500">
+                <a:solidFill>
+                  <a:srgbClr val="22282E"/>
+                </a:solidFill>
+              </a:rPr>
+              <a:t>•  ❓ ¿Cuál es la regla más importante?</a:t>
+            </a:r>
+          </a:p>
+          <a:p>
+            <a:pPr>
+              <a:spcAft>
+                <a:spcPts val="600"/>
+              </a:spcAft>
+            </a:pPr>
+            <a:r>
+              <a:rPr sz="1500">
+                <a:solidFill>
+                  <a:srgbClr val="22282E"/>
+                </a:solidFill>
+              </a:rPr>
+              <a:t>•  No inventes tu propia cripto: usa primitivas y librerías auditadas con defaults seguros (AEAD, KDFs lentas, curvas modernas).</a:t>
+            </a:r>
+          </a:p>
+          <a:p>
+            <a:pPr>
+              <a:spcAft>
+                <a:spcPts val="600"/>
+              </a:spcAft>
+            </a:pPr>
+            <a:r>
+              <a:rPr sz="1500">
+                <a:solidFill>
+                  <a:srgbClr val="22282E"/>
+                </a:solidFill>
+              </a:rPr>
+              <a:t>•  ❓ ¿Cómo detecto estos fallos a escala?</a:t>
+            </a:r>
+          </a:p>
+          <a:p>
+            <a:pPr>
+              <a:spcAft>
+                <a:spcPts val="600"/>
+              </a:spcAft>
+            </a:pPr>
+            <a:r>
+              <a:rPr sz="1500">
+                <a:solidFill>
+                  <a:srgbClr val="22282E"/>
+                </a:solidFill>
+              </a:rPr>
+              <a:t>•  Combina revisión manual con escáneres (bandit, semgrep, gitleaks) integrados en CI, y auditorías periódicas de TLS y almacenamiento.</a:t>
+            </a:r>
+          </a:p>
+          <a:p>
+            <a:pPr>
+              <a:spcAft>
+                <a:spcPts val="600"/>
+              </a:spcAft>
+            </a:pPr>
+            <a:r>
+              <a:rPr sz="1500">
+                <a:solidFill>
+                  <a:srgbClr val="22282E"/>
+                </a:solidFill>
+              </a:rPr>
+              <a:t>•  ❓ ¿Qué es la criptoagilidad y por qué me importa ahora?</a:t>
+            </a:r>
+          </a:p>
+          <a:p>
+            <a:pPr>
+              <a:spcAft>
+                <a:spcPts val="600"/>
+              </a:spcAft>
+            </a:pPr>
+            <a:r>
+              <a:rPr sz="1500">
+                <a:solidFill>
+                  <a:srgbClr val="22282E"/>
+                </a:solidFill>
+              </a:rPr>
+              <a:t>•  Poder cambiar algoritmos y claves sin rediseñar; será imprescindible en la migración post-cuántica y ante cualquier primitiva que se debilite.</a:t>
+            </a:r>
+          </a:p>
+        </p:txBody>
+      </p:sp>
+    </p:spTree>
+  </p:cSld>
+  <p:clrMapOvr>
+    <a:masterClrMapping/>
+  </p:clrMapOvr>
+</p:sld>
+</file>
+
+<file path=ppt/slides/slide14.xml><?xml version="1.0" encoding="utf-8"?>
+<p:sld xmlns:a="http://schemas.openxmlformats.org/drawingml/2006/main" xmlns:p="http://schemas.openxmlformats.org/presentationml/2006/main" xmlns:r="http://schemas.openxmlformats.org/officeDocument/2006/relationships">
+  <p:cSld>
+    <p:spTree>
+      <p:nvGrpSpPr>
+        <p:cNvPr id="1" name=""/>
+        <p:cNvGrpSpPr/>
+        <p:nvPr/>
+      </p:nvGrpSpPr>
+      <p:grpSpPr/>
+      <p:sp>
+        <p:nvSpPr>
+          <p:cNvPr id="2" name="TextBox 1"/>
+          <p:cNvSpPr txBox="1"/>
+          <p:nvPr/>
+        </p:nvSpPr>
+        <p:spPr>
+          <a:xfrm>
+            <a:off x="457200" y="320040"/>
+            <a:ext cx="8229600" cy="822960"/>
+          </a:xfrm>
+          <a:prstGeom prst="rect">
+            <a:avLst/>
+          </a:prstGeom>
+          <a:noFill/>
+        </p:spPr>
+        <p:txBody>
+          <a:bodyPr wrap="square">
+            <a:spAutoFit/>
+          </a:bodyPr>
+          <a:lstStyle/>
+          <a:p>
+            <a:r>
+              <a:rPr sz="2600" b="1">
+                <a:solidFill>
+                  <a:srgbClr val="0B3D2E"/>
+                </a:solidFill>
+              </a:rPr>
+              <a:t>🔗 Referencias</a:t>
+            </a:r>
+          </a:p>
+        </p:txBody>
+      </p:sp>
+      <p:sp>
+        <p:nvSpPr>
+          <p:cNvPr id="3" name="TextBox 2"/>
+          <p:cNvSpPr txBox="1"/>
+          <p:nvPr/>
+        </p:nvSpPr>
+        <p:spPr>
+          <a:xfrm>
+            <a:off x="457200" y="1280160"/>
+            <a:ext cx="8229600" cy="4937760"/>
+          </a:xfrm>
+          <a:prstGeom prst="rect">
+            <a:avLst/>
+          </a:prstGeom>
+          <a:noFill/>
+        </p:spPr>
+        <p:txBody>
+          <a:bodyPr wrap="square">
+            <a:spAutoFit/>
+          </a:bodyPr>
+          <a:lstStyle/>
+          <a:p>
+            <a:pPr>
+              <a:spcAft>
+                <a:spcPts val="600"/>
+              </a:spcAft>
+            </a:pPr>
+            <a:r>
+              <a:rPr sz="1500">
+                <a:solidFill>
+                  <a:srgbClr val="22282E"/>
+                </a:solidFill>
+              </a:rPr>
               <a:t>•  OWASP Top 10 A02:2021 Cryptographic Failures — &lt;https://owasp.org/Top10/A022021-CryptographicFailures/&gt;</a:t>
             </a:r>
           </a:p>
@@ -3614,6 +3870,81 @@
           </a:p>
         </p:txBody>
       </p:sp>
+    </p:spTree>
+  </p:cSld>
+  <p:clrMapOvr>
+    <a:masterClrMapping/>
+  </p:clrMapOvr>
+</p:sld>
+</file>
+
+<file path=ppt/slides/slide15.xml><?xml version="1.0" encoding="utf-8"?>
+<p:sld xmlns:a="http://schemas.openxmlformats.org/drawingml/2006/main" xmlns:p="http://schemas.openxmlformats.org/presentationml/2006/main" xmlns:r="http://schemas.openxmlformats.org/officeDocument/2006/relationships">
+  <p:cSld>
+    <p:spTree>
+      <p:nvGrpSpPr>
+        <p:cNvPr id="1" name=""/>
+        <p:cNvGrpSpPr/>
+        <p:nvPr/>
+      </p:nvGrpSpPr>
+      <p:grpSpPr/>
+      <p:sp>
+        <p:nvSpPr>
+          <p:cNvPr id="2" name="TextBox 1"/>
+          <p:cNvSpPr txBox="1"/>
+          <p:nvPr/>
+        </p:nvSpPr>
+        <p:spPr>
+          <a:xfrm>
+            <a:off x="457200" y="274320"/>
+            <a:ext cx="8229600" cy="640080"/>
+          </a:xfrm>
+          <a:prstGeom prst="rect">
+            <a:avLst/>
+          </a:prstGeom>
+          <a:noFill/>
+        </p:spPr>
+        <p:txBody>
+          <a:bodyPr wrap="square">
+            <a:spAutoFit/>
+          </a:bodyPr>
+          <a:lstStyle/>
+          <a:p>
+            <a:r>
+              <a:rPr sz="2200" b="1">
+                <a:solidFill>
+                  <a:srgbClr val="0B3D2E"/>
+                </a:solidFill>
+              </a:rPr>
+              <a:t>Diagrama de la clase</a:t>
+            </a:r>
+          </a:p>
+        </p:txBody>
+      </p:sp>
+      <p:pic>
+        <p:nvPicPr>
+          <p:cNvPr id="3" name="Picture 2" descr="274b647f174f83c4.png"/>
+          <p:cNvPicPr>
+            <a:picLocks noChangeAspect="1"/>
+          </p:cNvPicPr>
+          <p:nvPr/>
+        </p:nvPicPr>
+        <p:blipFill>
+          <a:blip r:embed="rId2"/>
+          <a:stretch>
+            <a:fillRect/>
+          </a:stretch>
+        </p:blipFill>
+        <p:spPr>
+          <a:xfrm>
+            <a:off x="457200" y="2948940"/>
+            <a:ext cx="8229600" cy="1600200"/>
+          </a:xfrm>
+          <a:prstGeom prst="rect">
+            <a:avLst/>
+          </a:prstGeom>
+        </p:spPr>
+      </p:pic>
     </p:spTree>
   </p:cSld>
   <p:clrMapOvr>
@@ -3698,7 +4029,7 @@
                   <a:srgbClr val="22282E"/>
                 </a:solidFill>
               </a:rPr>
-              <a:t>•  Cerrar la parte con la lección que unifica todo lo anterior: la criptografía se rompe en la implementación, no en las matemáticas. El alumno recopilará el catálogo de errores criptográficos comunes (los del OWASP A02 "Cryptographic Failures"), aprenderá a auditarlos y evitarlos, y consolidará las reglas de oro: usa librerías auditadas, AEAD por defecto, nonces únicos, aleatoriedad segura, comparación en tiempo constante y no inventes tu propia cripto.</a:t>
+              <a:t>•  Cerrar la parte con la lección que unifica todo lo anterior: la criptografía se rompe en la implementación, no en las matemáticas. El alumno recopilará el catálogo de errores criptográficos comunes…</a:t>
             </a:r>
           </a:p>
         </p:txBody>
@@ -4092,7 +4423,7 @@
                   <a:srgbClr val="0B3D2E"/>
                 </a:solidFill>
               </a:rPr>
-              <a:t>📖 Definiciones y características</a:t>
+              <a:t>🧠 Explicación en profundidad</a:t>
             </a:r>
           </a:p>
         </p:txBody>
@@ -4130,97 +4461,97 @@
                   <a:srgbClr val="22282E"/>
                 </a:solidFill>
               </a:rPr>
-              <a:t>•  Cryptographic Failures (OWASP A02): categoría que agrupa el uso de cripto débil, mal configurada o ausente que expone datos sensibles.</a:t>
-            </a:r>
-          </a:p>
-          <a:p>
-            <a:pPr>
-              <a:spcAft>
-                <a:spcPts val="600"/>
-              </a:spcAft>
-            </a:pPr>
-            <a:r>
-              <a:rPr sz="1500">
-                <a:solidFill>
-                  <a:srgbClr val="22282E"/>
-                </a:solidFill>
-              </a:rPr>
-              <a:t>•  Criptoagilidad: capacidad de un sistema para cambiar algoritmos y claves sin rediseñarse; clave para la migración PQC.</a:t>
-            </a:r>
-          </a:p>
-          <a:p>
-            <a:pPr>
-              <a:spcAft>
-                <a:spcPts val="600"/>
-              </a:spcAft>
-            </a:pPr>
-            <a:r>
-              <a:rPr sz="1500">
-                <a:solidFill>
-                  <a:srgbClr val="22282E"/>
-                </a:solidFill>
-              </a:rPr>
-              <a:t>•  Anti-patrón cripto: práctica insegura recurrente (ECB, IV fijo, clave en código, hash rápido para contraseñas, comparación con ==).</a:t>
-            </a:r>
-          </a:p>
-          <a:p>
-            <a:pPr>
-              <a:spcAft>
-                <a:spcPts val="600"/>
-              </a:spcAft>
-            </a:pPr>
-            <a:r>
-              <a:rPr sz="1500">
-                <a:solidFill>
-                  <a:srgbClr val="22282E"/>
-                </a:solidFill>
-              </a:rPr>
-              <a:t>•  Defaults seguros: elegir de fábrica AEAD, KDFs lentas y curvas modernas para que el camino fácil sea el correcto.</a:t>
-            </a:r>
-          </a:p>
-          <a:p>
-            <a:pPr>
-              <a:spcAft>
-                <a:spcPts val="600"/>
-              </a:spcAft>
-            </a:pPr>
-            <a:r>
-              <a:rPr sz="1500">
-                <a:solidFill>
-                  <a:srgbClr val="22282E"/>
-                </a:solidFill>
-              </a:rPr>
-              <a:t>•  Superficie de implementación: todo el código que rodea la primitiva (padding, parsing, manejo de errores) donde suelen estar los bugs.</a:t>
-            </a:r>
-          </a:p>
-          <a:p>
-            <a:pPr>
-              <a:spcAft>
-                <a:spcPts val="600"/>
-              </a:spcAft>
-            </a:pPr>
-            <a:r>
-              <a:rPr sz="1500">
-                <a:solidFill>
-                  <a:srgbClr val="22282E"/>
-                </a:solidFill>
-              </a:rPr>
-              <a:t>•  Fail closed: ante error, denegar sin exponer datos ni detalles.</a:t>
-            </a:r>
-          </a:p>
-          <a:p>
-            <a:pPr>
-              <a:spcAft>
-                <a:spcPts val="600"/>
-              </a:spcAft>
-            </a:pPr>
-            <a:r>
-              <a:rPr sz="1500">
-                <a:solidFill>
-                  <a:srgbClr val="22282E"/>
-                </a:solidFill>
-              </a:rPr>
-              <a:t>•  Gestión del ciclo de vida de claves: generación, distribución, rotación y destrucción seguras.</a:t>
+              <a:t>•  Las vulnerabilidades criptográficas reales casi nunca vienen de romper AES o RSA. Vienen de</a:t>
+            </a:r>
+          </a:p>
+          <a:p>
+            <a:pPr>
+              <a:spcAft>
+                <a:spcPts val="600"/>
+              </a:spcAft>
+            </a:pPr>
+            <a:r>
+              <a:rPr sz="1500">
+                <a:solidFill>
+                  <a:srgbClr val="22282E"/>
+                </a:solidFill>
+              </a:rPr>
+              <a:t>•  usarlos mal, y por eso OWASP colocó Cryptographic Failures en el segundo puesto de su</a:t>
+            </a:r>
+          </a:p>
+          <a:p>
+            <a:pPr>
+              <a:spcAft>
+                <a:spcPts val="600"/>
+              </a:spcAft>
+            </a:pPr>
+            <a:r>
+              <a:rPr sz="1500">
+                <a:solidFill>
+                  <a:srgbClr val="22282E"/>
+                </a:solidFill>
+              </a:rPr>
+              <a:t>•  Top 10. Esta clase recoge los patrones de fallo que se repiten y los convierte en una lista</a:t>
+            </a:r>
+          </a:p>
+          <a:p>
+            <a:pPr>
+              <a:spcAft>
+                <a:spcPts val="600"/>
+              </a:spcAft>
+            </a:pPr>
+            <a:r>
+              <a:rPr sz="1500">
+                <a:solidFill>
+                  <a:srgbClr val="22282E"/>
+                </a:solidFill>
+              </a:rPr>
+              <a:t>•  de comprobación aplicable.</a:t>
+            </a:r>
+          </a:p>
+          <a:p>
+            <a:pPr>
+              <a:spcAft>
+                <a:spcPts val="600"/>
+              </a:spcAft>
+            </a:pPr>
+            <a:r>
+              <a:rPr sz="1500">
+                <a:solidFill>
+                  <a:srgbClr val="22282E"/>
+                </a:solidFill>
+              </a:rPr>
+              <a:t>•  El principio rector es incómodo para el ego pero salva sistemas: no diseñes ni</a:t>
+            </a:r>
+          </a:p>
+          <a:p>
+            <a:pPr>
+              <a:spcAft>
+                <a:spcPts val="600"/>
+              </a:spcAft>
+            </a:pPr>
+            <a:r>
+              <a:rPr sz="1500">
+                <a:solidFill>
+                  <a:srgbClr val="22282E"/>
+                </a:solidFill>
+              </a:rPr>
+              <a:t>•  implementes primitivas propias. Usa bibliotecas maduras y, mejor todavía, bibliotecas</a:t>
+            </a:r>
+          </a:p>
+          <a:p>
+            <a:pPr>
+              <a:spcAft>
+                <a:spcPts val="600"/>
+              </a:spcAft>
+            </a:pPr>
+            <a:r>
+              <a:rPr sz="1500">
+                <a:solidFill>
+                  <a:srgbClr val="22282E"/>
+                </a:solidFill>
+              </a:rPr>
+              <a:t>•  de alto nivel con pocas decisiones —libsodium, Tink, cryptography de Python en su capa</a:t>
             </a:r>
           </a:p>
         </p:txBody>
@@ -4271,7 +4602,7 @@
                   <a:srgbClr val="0B3D2E"/>
                 </a:solidFill>
               </a:rPr>
-              <a:t>🧰 Herramientas y preparación</a:t>
+              <a:t>📖 Definiciones y características</a:t>
             </a:r>
           </a:p>
         </p:txBody>
@@ -4309,37 +4640,97 @@
                   <a:srgbClr val="22282E"/>
                 </a:solidFill>
               </a:rPr>
-              <a:t>•  pip install cryptography bandit</a:t>
-            </a:r>
-          </a:p>
-          <a:p>
-            <a:pPr>
-              <a:spcAft>
-                <a:spcPts val="600"/>
-              </a:spcAft>
-            </a:pPr>
-            <a:r>
-              <a:rPr sz="1500">
-                <a:solidFill>
-                  <a:srgbClr val="22282E"/>
-                </a:solidFill>
-              </a:rPr>
-              <a:t>•  which gitleaks semgrep 2&gt;/dev/null || echo "opcional: escáneres estáticos"</a:t>
-            </a:r>
-          </a:p>
-          <a:p>
-            <a:pPr>
-              <a:spcAft>
-                <a:spcPts val="600"/>
-              </a:spcAft>
-            </a:pPr>
-            <a:r>
-              <a:rPr sz="1500">
-                <a:solidFill>
-                  <a:srgbClr val="22282E"/>
-                </a:solidFill>
-              </a:rPr>
-              <a:t>•  Auditoría sobre código propio o autorizado.</a:t>
+              <a:t>•  Cryptographic Failures (OWASP A02): categoría que agrupa el uso de cripto débil, mal configurada o ausente que expone datos sensibles.</a:t>
+            </a:r>
+          </a:p>
+          <a:p>
+            <a:pPr>
+              <a:spcAft>
+                <a:spcPts val="600"/>
+              </a:spcAft>
+            </a:pPr>
+            <a:r>
+              <a:rPr sz="1500">
+                <a:solidFill>
+                  <a:srgbClr val="22282E"/>
+                </a:solidFill>
+              </a:rPr>
+              <a:t>•  Criptoagilidad: capacidad de un sistema para cambiar algoritmos y claves sin rediseñarse; clave para la migración PQC.</a:t>
+            </a:r>
+          </a:p>
+          <a:p>
+            <a:pPr>
+              <a:spcAft>
+                <a:spcPts val="600"/>
+              </a:spcAft>
+            </a:pPr>
+            <a:r>
+              <a:rPr sz="1500">
+                <a:solidFill>
+                  <a:srgbClr val="22282E"/>
+                </a:solidFill>
+              </a:rPr>
+              <a:t>•  Anti-patrón cripto: práctica insegura recurrente (ECB, IV fijo, clave en código, hash rápido para contraseñas, comparación con ==).</a:t>
+            </a:r>
+          </a:p>
+          <a:p>
+            <a:pPr>
+              <a:spcAft>
+                <a:spcPts val="600"/>
+              </a:spcAft>
+            </a:pPr>
+            <a:r>
+              <a:rPr sz="1500">
+                <a:solidFill>
+                  <a:srgbClr val="22282E"/>
+                </a:solidFill>
+              </a:rPr>
+              <a:t>•  Defaults seguros: elegir de fábrica AEAD, KDFs lentas y curvas modernas para que el camino fácil sea el correcto.</a:t>
+            </a:r>
+          </a:p>
+          <a:p>
+            <a:pPr>
+              <a:spcAft>
+                <a:spcPts val="600"/>
+              </a:spcAft>
+            </a:pPr>
+            <a:r>
+              <a:rPr sz="1500">
+                <a:solidFill>
+                  <a:srgbClr val="22282E"/>
+                </a:solidFill>
+              </a:rPr>
+              <a:t>•  Superficie de implementación: todo el código que rodea la primitiva (padding, parsing, manejo de errores) donde suelen estar los bugs.</a:t>
+            </a:r>
+          </a:p>
+          <a:p>
+            <a:pPr>
+              <a:spcAft>
+                <a:spcPts val="600"/>
+              </a:spcAft>
+            </a:pPr>
+            <a:r>
+              <a:rPr sz="1500">
+                <a:solidFill>
+                  <a:srgbClr val="22282E"/>
+                </a:solidFill>
+              </a:rPr>
+              <a:t>•  Fail closed: ante error, denegar sin exponer datos ni detalles.</a:t>
+            </a:r>
+          </a:p>
+          <a:p>
+            <a:pPr>
+              <a:spcAft>
+                <a:spcPts val="600"/>
+              </a:spcAft>
+            </a:pPr>
+            <a:r>
+              <a:rPr sz="1500">
+                <a:solidFill>
+                  <a:srgbClr val="22282E"/>
+                </a:solidFill>
+              </a:rPr>
+              <a:t>•  Gestión del ciclo de vida de claves: generación, distribución, rotación y destrucción seguras.</a:t>
             </a:r>
           </a:p>
         </p:txBody>
@@ -4390,7 +4781,7 @@
                   <a:srgbClr val="0B3D2E"/>
                 </a:solidFill>
               </a:rPr>
-              <a:t>🧪 Laboratorio guiado</a:t>
+              <a:t>📔 Glosario</a:t>
             </a:r>
           </a:p>
         </p:txBody>
@@ -4428,97 +4819,97 @@
                   <a:srgbClr val="22282E"/>
                 </a:solidFill>
               </a:rPr>
-              <a:t>•  Auditoría de código guiada. Toma este fragmento vulnerable y detecta todos los fallos:</a:t>
-            </a:r>
-          </a:p>
-          <a:p>
-            <a:pPr>
-              <a:spcAft>
-                <a:spcPts val="600"/>
-              </a:spcAft>
-            </a:pPr>
-            <a:r>
-              <a:rPr sz="1500">
-                <a:solidFill>
-                  <a:srgbClr val="22282E"/>
-                </a:solidFill>
-              </a:rPr>
-              <a:t>•  import hashlib, random</a:t>
-            </a:r>
-          </a:p>
-          <a:p>
-            <a:pPr>
-              <a:spcAft>
-                <a:spcPts val="600"/>
-              </a:spcAft>
-            </a:pPr>
-            <a:r>
-              <a:rPr sz="1500">
-                <a:solidFill>
-                  <a:srgbClr val="22282E"/>
-                </a:solidFill>
-              </a:rPr>
-              <a:t>•  KEY = b"1234567890123456"           # clave hardcodeada</a:t>
-            </a:r>
-          </a:p>
-          <a:p>
-            <a:pPr>
-              <a:spcAft>
-                <a:spcPts val="600"/>
-              </a:spcAft>
-            </a:pPr>
-            <a:r>
-              <a:rPr sz="1500">
-                <a:solidFill>
-                  <a:srgbClr val="22282E"/>
-                </a:solidFill>
-              </a:rPr>
-              <a:t>•  def cifrar(m):</a:t>
-            </a:r>
-          </a:p>
-          <a:p>
-            <a:pPr>
-              <a:spcAft>
-                <a:spcPts val="600"/>
-              </a:spcAft>
-            </a:pPr>
-            <a:r>
-              <a:rPr sz="1500">
-                <a:solidFill>
-                  <a:srgbClr val="22282E"/>
-                </a:solidFill>
-              </a:rPr>
-              <a:t>•  from cryptography.hazmat.primitives.ciphers import Cipher, algorithms, modes</a:t>
-            </a:r>
-          </a:p>
-          <a:p>
-            <a:pPr>
-              <a:spcAft>
-                <a:spcPts val="600"/>
-              </a:spcAft>
-            </a:pPr>
-            <a:r>
-              <a:rPr sz="1500">
-                <a:solidFill>
-                  <a:srgbClr val="22282E"/>
-                </a:solidFill>
-              </a:rPr>
-              <a:t>•  iv = b"\x00"  16                # IV fijo</a:t>
-            </a:r>
-          </a:p>
-          <a:p>
-            <a:pPr>
-              <a:spcAft>
-                <a:spcPts val="600"/>
-              </a:spcAft>
-            </a:pPr>
-            <a:r>
-              <a:rPr sz="1500">
-                <a:solidFill>
-                  <a:srgbClr val="22282E"/>
-                </a:solidFill>
-              </a:rPr>
-              <a:t>•  c = Cipher(algorithms.AES(KEY), modes.ECB())  # ECB, sin auth</a:t>
+              <a:t>•  Término — Definición concisa</a:t>
+            </a:r>
+          </a:p>
+          <a:p>
+            <a:pPr>
+              <a:spcAft>
+                <a:spcPts val="600"/>
+              </a:spcAft>
+            </a:pPr>
+            <a:r>
+              <a:rPr sz="1500">
+                <a:solidFill>
+                  <a:srgbClr val="22282E"/>
+                </a:solidFill>
+              </a:rPr>
+              <a:t>•  OWASP A02 — Cryptographic Failures: categoría del Top 10</a:t>
+            </a:r>
+          </a:p>
+          <a:p>
+            <a:pPr>
+              <a:spcAft>
+                <a:spcPts val="600"/>
+              </a:spcAft>
+            </a:pPr>
+            <a:r>
+              <a:rPr sz="1500">
+                <a:solidFill>
+                  <a:srgbClr val="22282E"/>
+                </a:solidFill>
+              </a:rPr>
+              <a:t>•  No inventes criptografía — Usar bibliotecas maduras en vez de implementaciones propias</a:t>
+            </a:r>
+          </a:p>
+          <a:p>
+            <a:pPr>
+              <a:spcAft>
+                <a:spcPts val="600"/>
+              </a:spcAft>
+            </a:pPr>
+            <a:r>
+              <a:rPr sz="1500">
+                <a:solidFill>
+                  <a:srgbClr val="22282E"/>
+                </a:solidFill>
+              </a:rPr>
+              <a:t>•  API de alto nivel — Biblioteca que no deja elegir modo, relleno ni IV</a:t>
+            </a:r>
+          </a:p>
+          <a:p>
+            <a:pPr>
+              <a:spcAft>
+                <a:spcPts val="600"/>
+              </a:spcAft>
+            </a:pPr>
+            <a:r>
+              <a:rPr sz="1500">
+                <a:solidFill>
+                  <a:srgbClr val="22282E"/>
+                </a:solidFill>
+              </a:rPr>
+              <a:t>•  libsodium / Tink / age — Bibliotecas con el camino fácil ya seguro</a:t>
+            </a:r>
+          </a:p>
+          <a:p>
+            <a:pPr>
+              <a:spcAft>
+                <a:spcPts val="600"/>
+              </a:spcAft>
+            </a:pPr>
+            <a:r>
+              <a:rPr sz="1500">
+                <a:solidFill>
+                  <a:srgbClr val="22282E"/>
+                </a:solidFill>
+              </a:rPr>
+              <a:t>•  Primitiva obsoleta — DES, 3DES, MD5, SHA-1, RC4, ECB</a:t>
+            </a:r>
+          </a:p>
+          <a:p>
+            <a:pPr>
+              <a:spcAft>
+                <a:spcPts val="600"/>
+              </a:spcAft>
+            </a:pPr>
+            <a:r>
+              <a:rPr sz="1500">
+                <a:solidFill>
+                  <a:srgbClr val="22282E"/>
+                </a:solidFill>
+              </a:rPr>
+              <a:t>•  IV predecible — Vector de inicialización fijo o adivinable en CBC</a:t>
             </a:r>
           </a:p>
         </p:txBody>
@@ -4569,7 +4960,7 @@
                   <a:srgbClr val="0B3D2E"/>
                 </a:solidFill>
               </a:rPr>
-              <a:t>✍️ Ejercicios</a:t>
+              <a:t>🧰 Herramientas y preparación</a:t>
             </a:r>
           </a:p>
         </p:txBody>
@@ -4607,82 +4998,7 @@
                   <a:srgbClr val="22282E"/>
                 </a:solidFill>
               </a:rPr>
-              <a:t>•  Lista siete anti-patrones cripto y su corrección.</a:t>
-            </a:r>
-          </a:p>
-          <a:p>
-            <a:pPr>
-              <a:spcAft>
-                <a:spcPts val="600"/>
-              </a:spcAft>
-            </a:pPr>
-            <a:r>
-              <a:rPr sz="1500">
-                <a:solidFill>
-                  <a:srgbClr val="22282E"/>
-                </a:solidFill>
-              </a:rPr>
-              <a:t>•  Reescribe el fragmento vulnerable del laboratorio de forma segura.</a:t>
-            </a:r>
-          </a:p>
-          <a:p>
-            <a:pPr>
-              <a:spcAft>
-                <a:spcPts val="600"/>
-              </a:spcAft>
-            </a:pPr>
-            <a:r>
-              <a:rPr sz="1500">
-                <a:solidFill>
-                  <a:srgbClr val="22282E"/>
-                </a:solidFill>
-              </a:rPr>
-              <a:t>•  Ejecuta bandit y explica cada advertencia relevante.</a:t>
-            </a:r>
-          </a:p>
-          <a:p>
-            <a:pPr>
-              <a:spcAft>
-                <a:spcPts val="600"/>
-              </a:spcAft>
-            </a:pPr>
-            <a:r>
-              <a:rPr sz="1500">
-                <a:solidFill>
-                  <a:srgbClr val="22282E"/>
-                </a:solidFill>
-              </a:rPr>
-              <a:t>•  Diseña un formato de mensaje cifrado con versión para criptoagilidad.</a:t>
-            </a:r>
-          </a:p>
-          <a:p>
-            <a:pPr>
-              <a:spcAft>
-                <a:spcPts val="600"/>
-              </a:spcAft>
-            </a:pPr>
-            <a:r>
-              <a:rPr sz="1500">
-                <a:solidFill>
-                  <a:srgbClr val="22282E"/>
-                </a:solidFill>
-              </a:rPr>
-              <a:t>•  Audita una configuración TLS y una de almacenamiento de contraseñas juntas.</a:t>
-            </a:r>
-          </a:p>
-          <a:p>
-            <a:pPr>
-              <a:spcAft>
-                <a:spcPts val="600"/>
-              </a:spcAft>
-            </a:pPr>
-            <a:r>
-              <a:rPr sz="1500">
-                <a:solidFill>
-                  <a:srgbClr val="22282E"/>
-                </a:solidFill>
-              </a:rPr>
-              <a:t>•  Redacta una guía interna de "reglas de oro cripto" para tu equipo.</a:t>
+              <a:t>•  Auditoría sobre código propio o autorizado.</a:t>
             </a:r>
           </a:p>
         </p:txBody>
@@ -4733,7 +5049,7 @@
                   <a:srgbClr val="0B3D2E"/>
                 </a:solidFill>
               </a:rPr>
-              <a:t>📝 Reto verificable</a:t>
+              <a:t>🧪 Laboratorio guiado</a:t>
             </a:r>
           </a:p>
         </p:txBody>
@@ -4771,7 +5087,82 @@
                   <a:srgbClr val="22282E"/>
                 </a:solidFill>
               </a:rPr>
-              <a:t>•  Toma un módulo con al menos cinco fallos criptográficos (el del laboratorio u otro que construyas) y entrégalo corregido: AEAD, nonces del CSPRNG, claves fuera del código, Argon2id para contraseñas y comparaciones en tiempo constante, con versión de formato para criptoagilidad. Criterio de aceptación: bandit no reporta fallos cripto de severidad media/alta en el módulo corregido, los tests de cifrado/descifrado y de autenticación pasan, y ninguna clave o secreto aparece en el código.</a:t>
+              <a:t>•  Auditoría de código guiada. Toma este fragmento vulnerable y detecta todos los fallos:</a:t>
+            </a:r>
+          </a:p>
+          <a:p>
+            <a:pPr>
+              <a:spcAft>
+                <a:spcPts val="600"/>
+              </a:spcAft>
+            </a:pPr>
+            <a:r>
+              <a:rPr sz="1500">
+                <a:solidFill>
+                  <a:srgbClr val="22282E"/>
+                </a:solidFill>
+              </a:rPr>
+              <a:t>•  Identifica: clave en código, ECB, sin autenticación, IV fijo, PRNG inseguro, comparación no constante y MD5 para contraseñas.</a:t>
+            </a:r>
+          </a:p>
+          <a:p>
+            <a:pPr>
+              <a:spcAft>
+                <a:spcPts val="600"/>
+              </a:spcAft>
+            </a:pPr>
+            <a:r>
+              <a:rPr sz="1500">
+                <a:solidFill>
+                  <a:srgbClr val="22282E"/>
+                </a:solidFill>
+              </a:rPr>
+              <a:t>•  Reescríbelo de forma segura: clave desde KMS/Vault o variable de entorno, AES-GCM (AEAD) con nonce del CSPRNG, secrets para tokens, hmac.comparedigest, Argon2id para contraseñas.</a:t>
+            </a:r>
+          </a:p>
+          <a:p>
+            <a:pPr>
+              <a:spcAft>
+                <a:spcPts val="600"/>
+              </a:spcAft>
+            </a:pPr>
+            <a:r>
+              <a:rPr sz="1500">
+                <a:solidFill>
+                  <a:srgbClr val="22282E"/>
+                </a:solidFill>
+              </a:rPr>
+              <a:t>•  Escáneres estáticos. Corre bandit sobre el archivo y gitleaks/semgrep para detectar la clave hardcodeada; compara hallazgos con tu revisión manual.</a:t>
+            </a:r>
+          </a:p>
+          <a:p>
+            <a:pPr>
+              <a:spcAft>
+                <a:spcPts val="600"/>
+              </a:spcAft>
+            </a:pPr>
+            <a:r>
+              <a:rPr sz="1500">
+                <a:solidFill>
+                  <a:srgbClr val="22282E"/>
+                </a:solidFill>
+              </a:rPr>
+              <a:t>•  Checklist de criptoagilidad. Verifica que tu diseño permite cambiar algoritmo/clave por configuración y versiona el formato de los mensajes cifrados.</a:t>
+            </a:r>
+          </a:p>
+          <a:p>
+            <a:pPr>
+              <a:spcAft>
+                <a:spcPts val="600"/>
+              </a:spcAft>
+            </a:pPr>
+            <a:r>
+              <a:rPr sz="1500">
+                <a:solidFill>
+                  <a:srgbClr val="22282E"/>
+                </a:solidFill>
+              </a:rPr>
+              <a:t>•  Revisión de dependencias. Comprueba que usas librerías mantenidas (cryptography, libsodium) y no implementaciones caseras de primitivas.</a:t>
             </a:r>
           </a:p>
         </p:txBody>
